--- a/ゲーム科1年/00_前期/プログラミングⅠ/11_ここまでの課題.pptx
+++ b/ゲーム科1年/00_前期/プログラミングⅠ/11_ここまでの課題.pptx
@@ -260,7 +260,7 @@
           <a:p>
             <a:fld id="{E9CC885B-4903-4D54-9A93-00025F12DED9}" type="datetimeFigureOut">
               <a:rPr kumimoji="1" lang="ja-JP" altLang="en-US" smtClean="0"/>
-              <a:t>2024/11/14</a:t>
+              <a:t>2025/2/28</a:t>
             </a:fld>
             <a:endParaRPr kumimoji="1" lang="ja-JP" altLang="en-US"/>
           </a:p>
@@ -490,7 +490,7 @@
           <a:p>
             <a:fld id="{E9CC885B-4903-4D54-9A93-00025F12DED9}" type="datetimeFigureOut">
               <a:rPr kumimoji="1" lang="ja-JP" altLang="en-US" smtClean="0"/>
-              <a:t>2024/11/14</a:t>
+              <a:t>2025/2/28</a:t>
             </a:fld>
             <a:endParaRPr kumimoji="1" lang="ja-JP" altLang="en-US"/>
           </a:p>
@@ -730,7 +730,7 @@
           <a:p>
             <a:fld id="{E9CC885B-4903-4D54-9A93-00025F12DED9}" type="datetimeFigureOut">
               <a:rPr kumimoji="1" lang="ja-JP" altLang="en-US" smtClean="0"/>
-              <a:t>2024/11/14</a:t>
+              <a:t>2025/2/28</a:t>
             </a:fld>
             <a:endParaRPr kumimoji="1" lang="ja-JP" altLang="en-US"/>
           </a:p>
@@ -960,7 +960,7 @@
           <a:p>
             <a:fld id="{E9CC885B-4903-4D54-9A93-00025F12DED9}" type="datetimeFigureOut">
               <a:rPr kumimoji="1" lang="ja-JP" altLang="en-US" smtClean="0"/>
-              <a:t>2024/11/14</a:t>
+              <a:t>2025/2/28</a:t>
             </a:fld>
             <a:endParaRPr kumimoji="1" lang="ja-JP" altLang="en-US"/>
           </a:p>
@@ -1235,7 +1235,7 @@
           <a:p>
             <a:fld id="{E9CC885B-4903-4D54-9A93-00025F12DED9}" type="datetimeFigureOut">
               <a:rPr kumimoji="1" lang="ja-JP" altLang="en-US" smtClean="0"/>
-              <a:t>2024/11/14</a:t>
+              <a:t>2025/2/28</a:t>
             </a:fld>
             <a:endParaRPr kumimoji="1" lang="ja-JP" altLang="en-US"/>
           </a:p>
@@ -1564,7 +1564,7 @@
           <a:p>
             <a:fld id="{E9CC885B-4903-4D54-9A93-00025F12DED9}" type="datetimeFigureOut">
               <a:rPr kumimoji="1" lang="ja-JP" altLang="en-US" smtClean="0"/>
-              <a:t>2024/11/14</a:t>
+              <a:t>2025/2/28</a:t>
             </a:fld>
             <a:endParaRPr kumimoji="1" lang="ja-JP" altLang="en-US"/>
           </a:p>
@@ -2040,7 +2040,7 @@
           <a:p>
             <a:fld id="{E9CC885B-4903-4D54-9A93-00025F12DED9}" type="datetimeFigureOut">
               <a:rPr kumimoji="1" lang="ja-JP" altLang="en-US" smtClean="0"/>
-              <a:t>2024/11/14</a:t>
+              <a:t>2025/2/28</a:t>
             </a:fld>
             <a:endParaRPr kumimoji="1" lang="ja-JP" altLang="en-US"/>
           </a:p>
@@ -2181,7 +2181,7 @@
           <a:p>
             <a:fld id="{E9CC885B-4903-4D54-9A93-00025F12DED9}" type="datetimeFigureOut">
               <a:rPr kumimoji="1" lang="ja-JP" altLang="en-US" smtClean="0"/>
-              <a:t>2024/11/14</a:t>
+              <a:t>2025/2/28</a:t>
             </a:fld>
             <a:endParaRPr kumimoji="1" lang="ja-JP" altLang="en-US"/>
           </a:p>
@@ -2294,7 +2294,7 @@
           <a:p>
             <a:fld id="{E9CC885B-4903-4D54-9A93-00025F12DED9}" type="datetimeFigureOut">
               <a:rPr kumimoji="1" lang="ja-JP" altLang="en-US" smtClean="0"/>
-              <a:t>2024/11/14</a:t>
+              <a:t>2025/2/28</a:t>
             </a:fld>
             <a:endParaRPr kumimoji="1" lang="ja-JP" altLang="en-US"/>
           </a:p>
@@ -2637,7 +2637,7 @@
           <a:p>
             <a:fld id="{E9CC885B-4903-4D54-9A93-00025F12DED9}" type="datetimeFigureOut">
               <a:rPr kumimoji="1" lang="ja-JP" altLang="en-US" smtClean="0"/>
-              <a:t>2024/11/14</a:t>
+              <a:t>2025/2/28</a:t>
             </a:fld>
             <a:endParaRPr kumimoji="1" lang="ja-JP" altLang="en-US"/>
           </a:p>
@@ -2925,7 +2925,7 @@
           <a:p>
             <a:fld id="{E9CC885B-4903-4D54-9A93-00025F12DED9}" type="datetimeFigureOut">
               <a:rPr kumimoji="1" lang="ja-JP" altLang="en-US" smtClean="0"/>
-              <a:t>2024/11/14</a:t>
+              <a:t>2025/2/28</a:t>
             </a:fld>
             <a:endParaRPr kumimoji="1" lang="ja-JP" altLang="en-US"/>
           </a:p>
@@ -3198,7 +3198,7 @@
           <a:p>
             <a:fld id="{E9CC885B-4903-4D54-9A93-00025F12DED9}" type="datetimeFigureOut">
               <a:rPr kumimoji="1" lang="ja-JP" altLang="en-US" smtClean="0"/>
-              <a:t>2024/11/14</a:t>
+              <a:t>2025/2/28</a:t>
             </a:fld>
             <a:endParaRPr kumimoji="1" lang="ja-JP" altLang="en-US"/>
           </a:p>
@@ -3813,7 +3813,7 @@
         <p:spPr>
           <a:xfrm>
             <a:off x="567542" y="1189161"/>
-            <a:ext cx="11718273" cy="3046988"/>
+            <a:ext cx="11931471" cy="3046988"/>
           </a:xfrm>
           <a:prstGeom prst="rect">
             <a:avLst/>
@@ -3900,14 +3900,14 @@
             </a:r>
             <a:r>
               <a:rPr lang="ja-JP" altLang="en-US" sz="2400" dirty="0"/>
-              <a:t>の左にスペースを入れる）</a:t>
+              <a:t>の左にスペースあり）を使いましょう。</a:t>
             </a:r>
             <a:endParaRPr lang="en-US" altLang="ja-JP" sz="2400" dirty="0"/>
           </a:p>
           <a:p>
             <a:r>
               <a:rPr lang="ja-JP" altLang="en-US" sz="2400" dirty="0"/>
-              <a:t>　ようにしましょう。直前の</a:t>
+              <a:t>　スペースがないと直前の</a:t>
             </a:r>
             <a:r>
               <a:rPr lang="en-US" altLang="ja-JP" sz="2400" dirty="0"/>
@@ -3949,19 +3949,15 @@
                   <a:srgbClr val="FF0000"/>
                 </a:solidFill>
               </a:rPr>
-              <a:t>文を使ってください</a:t>
-            </a:r>
-            <a:r>
-              <a:rPr lang="ja-JP" altLang="en-US" sz="2400" dirty="0"/>
-              <a:t>（余裕があれば</a:t>
-            </a:r>
-            <a:r>
-              <a:rPr lang="en-US" altLang="ja-JP" sz="2400" dirty="0"/>
-              <a:t>if</a:t>
-            </a:r>
-            <a:r>
-              <a:rPr lang="ja-JP" altLang="en-US" sz="2400" dirty="0"/>
-              <a:t>文を使わない方法も考えましょう）</a:t>
+              <a:t>文を</a:t>
+            </a:r>
+            <a:r>
+              <a:rPr lang="ja-JP" altLang="en-US" sz="2400" b="1">
+                <a:solidFill>
+                  <a:srgbClr val="FF0000"/>
+                </a:solidFill>
+              </a:rPr>
+              <a:t>使ってください</a:t>
             </a:r>
             <a:endParaRPr lang="en-US" altLang="ja-JP" sz="2400" dirty="0"/>
           </a:p>
